--- a/Zadania domowe/Jakub_Wojciechowski_49872_homework_4_2_regression.pptx
+++ b/Zadania domowe/Jakub_Wojciechowski_49872_homework_4_2_regression.pptx
@@ -129,18 +129,18 @@
   <pc:docChgLst>
     <pc:chgData name="Jakub Wojciechowski" userId="ee59becc-10bc-4bea-a8c2-abcd21dbb78b" providerId="ADAL" clId="{6E28A7B6-A803-5EC2-8BCD-1276546AE81E}"/>
     <pc:docChg chg="undo redo custSel modSld addSection delSection">
-      <pc:chgData name="Jakub Wojciechowski" userId="ee59becc-10bc-4bea-a8c2-abcd21dbb78b" providerId="ADAL" clId="{6E28A7B6-A803-5EC2-8BCD-1276546AE81E}" dt="2026-10-07T21:05:33.510" v="6" actId="17853"/>
+      <pc:chgData name="Jakub Wojciechowski" userId="ee59becc-10bc-4bea-a8c2-abcd21dbb78b" providerId="ADAL" clId="{6E28A7B6-A803-5EC2-8BCD-1276546AE81E}" dt="2026-10-07T23:17:09.962" v="12" actId="20577"/>
       <pc:docMkLst>
         <pc:docMk/>
       </pc:docMkLst>
       <pc:sldChg chg="modSp mod">
-        <pc:chgData name="Jakub Wojciechowski" userId="ee59becc-10bc-4bea-a8c2-abcd21dbb78b" providerId="ADAL" clId="{6E28A7B6-A803-5EC2-8BCD-1276546AE81E}" dt="2026-10-07T21:02:34.531" v="3" actId="20577"/>
+        <pc:chgData name="Jakub Wojciechowski" userId="ee59becc-10bc-4bea-a8c2-abcd21dbb78b" providerId="ADAL" clId="{6E28A7B6-A803-5EC2-8BCD-1276546AE81E}" dt="2026-10-07T23:17:09.962" v="12" actId="20577"/>
         <pc:sldMkLst>
           <pc:docMk/>
           <pc:sldMk cId="0" sldId="256"/>
         </pc:sldMkLst>
         <pc:spChg chg="mod">
-          <ac:chgData name="Jakub Wojciechowski" userId="ee59becc-10bc-4bea-a8c2-abcd21dbb78b" providerId="ADAL" clId="{6E28A7B6-A803-5EC2-8BCD-1276546AE81E}" dt="2026-10-07T21:02:34.531" v="3" actId="20577"/>
+          <ac:chgData name="Jakub Wojciechowski" userId="ee59becc-10bc-4bea-a8c2-abcd21dbb78b" providerId="ADAL" clId="{6E28A7B6-A803-5EC2-8BCD-1276546AE81E}" dt="2026-10-07T23:17:09.962" v="12" actId="20577"/>
           <ac:spMkLst>
             <pc:docMk/>
             <pc:sldMk cId="0" sldId="256"/>
@@ -1607,7 +1607,7 @@
           </a:prstGeom>
           <a:extLst>
             <a:ext uri="{C572A759-6A51-4108-AA02-DFA0A04FC94B}">
-              <ma14:wrappingTextBoxFlag xmlns="" xmlns:ma14="http://schemas.microsoft.com/office/mac/drawingml/2011/main" val="0"/>
+              <ma14:wrappingTextBoxFlag xmlns:ma14="http://schemas.microsoft.com/office/mac/drawingml/2011/main" xmlns="" val="0"/>
             </a:ext>
           </a:extLst>
         </p:spPr>
@@ -1682,7 +1682,7 @@
           </a:prstGeom>
           <a:extLst>
             <a:ext uri="{C572A759-6A51-4108-AA02-DFA0A04FC94B}">
-              <ma14:wrappingTextBoxFlag xmlns="" xmlns:ma14="http://schemas.microsoft.com/office/mac/drawingml/2011/main" val="0"/>
+              <ma14:wrappingTextBoxFlag xmlns:ma14="http://schemas.microsoft.com/office/mac/drawingml/2011/main" xmlns="" val="0"/>
             </a:ext>
           </a:extLst>
         </p:spPr>
@@ -2071,7 +2071,23 @@
                   <a:schemeClr val="bg2"/>
                 </a:solidFill>
               </a:rPr>
-              <a:t>·  Jakub Wojciechowski  ·  Kozminski University</a:t>
+              <a:t>·  </a:t>
+            </a:r>
+            <a:r>
+              <a:rPr lang="en-US" sz="1800">
+                <a:solidFill>
+                  <a:schemeClr val="bg2"/>
+                </a:solidFill>
+              </a:rPr>
+              <a:t>Jakub Wojciechowski 49872  </a:t>
+            </a:r>
+            <a:r>
+              <a:rPr lang="en-US" sz="1800" dirty="0">
+                <a:solidFill>
+                  <a:schemeClr val="bg2"/>
+                </a:solidFill>
+              </a:rPr>
+              <a:t>·  Kozminski University</a:t>
             </a:r>
             <a:endParaRPr lang="en-US" sz="1800" dirty="0"/>
           </a:p>
@@ -2986,7 +3002,7 @@
           </a:prstGeom>
           <a:extLst>
             <a:ext uri="{C572A759-6A51-4108-AA02-DFA0A04FC94B}">
-              <ma14:wrappingTextBoxFlag xmlns="" xmlns:ma14="http://schemas.microsoft.com/office/mac/drawingml/2011/main" val="0"/>
+              <ma14:wrappingTextBoxFlag xmlns:ma14="http://schemas.microsoft.com/office/mac/drawingml/2011/main" xmlns="" val="0"/>
             </a:ext>
           </a:extLst>
         </p:spPr>
@@ -3523,7 +3539,7 @@
           </a:prstGeom>
           <a:extLst>
             <a:ext uri="{C572A759-6A51-4108-AA02-DFA0A04FC94B}">
-              <ma14:wrappingTextBoxFlag xmlns="" xmlns:ma14="http://schemas.microsoft.com/office/mac/drawingml/2011/main" val="0"/>
+              <ma14:wrappingTextBoxFlag xmlns:ma14="http://schemas.microsoft.com/office/mac/drawingml/2011/main" xmlns="" val="0"/>
             </a:ext>
           </a:extLst>
         </p:spPr>
@@ -3720,7 +3736,7 @@
           </a:prstGeom>
           <a:extLst>
             <a:ext uri="{C572A759-6A51-4108-AA02-DFA0A04FC94B}">
-              <ma14:wrappingTextBoxFlag xmlns="" xmlns:ma14="http://schemas.microsoft.com/office/mac/drawingml/2011/main" val="0"/>
+              <ma14:wrappingTextBoxFlag xmlns:ma14="http://schemas.microsoft.com/office/mac/drawingml/2011/main" xmlns="" val="0"/>
             </a:ext>
           </a:extLst>
         </p:spPr>
@@ -5272,7 +5288,7 @@
           </a:prstGeom>
           <a:extLst>
             <a:ext uri="{C572A759-6A51-4108-AA02-DFA0A04FC94B}">
-              <ma14:wrappingTextBoxFlag xmlns="" xmlns:ma14="http://schemas.microsoft.com/office/mac/drawingml/2011/main" val="0"/>
+              <ma14:wrappingTextBoxFlag xmlns:ma14="http://schemas.microsoft.com/office/mac/drawingml/2011/main" xmlns="" val="0"/>
             </a:ext>
           </a:extLst>
         </p:spPr>
@@ -5981,7 +5997,7 @@
           </a:prstGeom>
           <a:extLst>
             <a:ext uri="{C572A759-6A51-4108-AA02-DFA0A04FC94B}">
-              <ma14:wrappingTextBoxFlag xmlns="" xmlns:ma14="http://schemas.microsoft.com/office/mac/drawingml/2011/main" val="0"/>
+              <ma14:wrappingTextBoxFlag xmlns:ma14="http://schemas.microsoft.com/office/mac/drawingml/2011/main" xmlns="" val="0"/>
             </a:ext>
           </a:extLst>
         </p:spPr>
@@ -6228,7 +6244,7 @@
           </a:prstGeom>
           <a:extLst>
             <a:ext uri="{C572A759-6A51-4108-AA02-DFA0A04FC94B}">
-              <ma14:wrappingTextBoxFlag xmlns="" xmlns:ma14="http://schemas.microsoft.com/office/mac/drawingml/2011/main" val="0"/>
+              <ma14:wrappingTextBoxFlag xmlns:ma14="http://schemas.microsoft.com/office/mac/drawingml/2011/main" xmlns="" val="0"/>
             </a:ext>
           </a:extLst>
         </p:spPr>
@@ -7456,7 +7472,7 @@
           </a:prstGeom>
           <a:extLst>
             <a:ext uri="{C572A759-6A51-4108-AA02-DFA0A04FC94B}">
-              <ma14:wrappingTextBoxFlag xmlns="" xmlns:ma14="http://schemas.microsoft.com/office/mac/drawingml/2011/main" val="0"/>
+              <ma14:wrappingTextBoxFlag xmlns:ma14="http://schemas.microsoft.com/office/mac/drawingml/2011/main" xmlns="" val="0"/>
             </a:ext>
           </a:extLst>
         </p:spPr>
@@ -7653,7 +7669,7 @@
           </a:prstGeom>
           <a:extLst>
             <a:ext uri="{C572A759-6A51-4108-AA02-DFA0A04FC94B}">
-              <ma14:wrappingTextBoxFlag xmlns="" xmlns:ma14="http://schemas.microsoft.com/office/mac/drawingml/2011/main" val="0"/>
+              <ma14:wrappingTextBoxFlag xmlns:ma14="http://schemas.microsoft.com/office/mac/drawingml/2011/main" xmlns="" val="0"/>
             </a:ext>
           </a:extLst>
         </p:spPr>
@@ -8190,7 +8206,7 @@
           </a:prstGeom>
           <a:extLst>
             <a:ext uri="{C572A759-6A51-4108-AA02-DFA0A04FC94B}">
-              <ma14:wrappingTextBoxFlag xmlns="" xmlns:ma14="http://schemas.microsoft.com/office/mac/drawingml/2011/main" val="0"/>
+              <ma14:wrappingTextBoxFlag xmlns:ma14="http://schemas.microsoft.com/office/mac/drawingml/2011/main" xmlns="" val="0"/>
             </a:ext>
           </a:extLst>
         </p:spPr>
@@ -10330,7 +10346,7 @@
           </a:prstGeom>
           <a:extLst>
             <a:ext uri="{C572A759-6A51-4108-AA02-DFA0A04FC94B}">
-              <ma14:wrappingTextBoxFlag xmlns="" xmlns:ma14="http://schemas.microsoft.com/office/mac/drawingml/2011/main" val="0"/>
+              <ma14:wrappingTextBoxFlag xmlns:ma14="http://schemas.microsoft.com/office/mac/drawingml/2011/main" xmlns="" val="0"/>
             </a:ext>
           </a:extLst>
         </p:spPr>
@@ -10527,7 +10543,7 @@
           </a:prstGeom>
           <a:extLst>
             <a:ext uri="{C572A759-6A51-4108-AA02-DFA0A04FC94B}">
-              <ma14:wrappingTextBoxFlag xmlns="" xmlns:ma14="http://schemas.microsoft.com/office/mac/drawingml/2011/main" val="0"/>
+              <ma14:wrappingTextBoxFlag xmlns:ma14="http://schemas.microsoft.com/office/mac/drawingml/2011/main" xmlns="" val="0"/>
             </a:ext>
           </a:extLst>
         </p:spPr>
@@ -12738,7 +12754,7 @@
           </a:prstGeom>
           <a:extLst>
             <a:ext uri="{C572A759-6A51-4108-AA02-DFA0A04FC94B}">
-              <ma14:wrappingTextBoxFlag xmlns="" xmlns:ma14="http://schemas.microsoft.com/office/mac/drawingml/2011/main" val="0"/>
+              <ma14:wrappingTextBoxFlag xmlns:ma14="http://schemas.microsoft.com/office/mac/drawingml/2011/main" xmlns="" val="0"/>
             </a:ext>
           </a:extLst>
         </p:spPr>
